--- a/dist/inpatient_adequacy_lecture.pptx
+++ b/dist/inpatient_adequacy_lecture.pptx
@@ -146,14 +146,14 @@
   <p:extLst>
     <p:ext uri="{521415D9-36F7-43E2-AB2F-B90AF26B5E84}">
       <p14:sectionLst xmlns:p14="http://schemas.microsoft.com/office/powerpoint/2010/main">
-        <p14:section name="도입" id="{1095bfc5-23a6-7d12-3c8b-756b75e3425d}">
+        <p14:section name="도입" id="{6a6f76e5-47f4-2874-5352-dfa979dfddb8}">
           <p14:sldIdLst>
             <p14:sldId id="256"/>
             <p14:sldId id="257"/>
             <p14:sldId id="258"/>
           </p14:sldIdLst>
         </p14:section>
-        <p14:section name="01 입원적정성이란" id="{952ff76b-a868-501f-1667-2f50fcba57e0}">
+        <p14:section name="01 입원적정성이란" id="{5855ef0d-a4a6-5cc7-113d-6d241cb05b08}">
           <p14:sldIdLst>
             <p14:sldId id="259"/>
             <p14:sldId id="260"/>
@@ -163,7 +163,7 @@
             <p14:sldId id="264"/>
           </p14:sldIdLst>
         </p14:section>
-        <p14:section name="02 사례" id="{07cd6a47-e9b1-5744-386a-440789b46937}">
+        <p14:section name="02 사례" id="{534145cb-e059-b470-4cdf-7e11f4b551fc}">
           <p14:sldIdLst>
             <p14:sldId id="265"/>
             <p14:sldId id="266"/>
@@ -175,7 +175,7 @@
             <p14:sldId id="272"/>
           </p14:sldIdLst>
         </p14:section>
-        <p14:section name="03 네 가지 배경" id="{ab47f054-ca03-549c-6f32-1b92e24b950b}">
+        <p14:section name="03 네 가지 배경" id="{408a2480-2972-57eb-af1d-75e9631a185e}">
           <p14:sldIdLst>
             <p14:sldId id="273"/>
             <p14:sldId id="274"/>
@@ -185,7 +185,7 @@
             <p14:sldId id="278"/>
           </p14:sldIdLst>
         </p14:section>
-        <p14:section name="04 실손 재매입과 5세대" id="{18f4005a-8e91-2d19-9351-03641003b64e}">
+        <p14:section name="04 실손 재매입과 5세대" id="{8386d7e7-8f62-03b2-087b-0d2dc827b1a2}">
           <p14:sldIdLst>
             <p14:sldId id="279"/>
             <p14:sldId id="280"/>
@@ -194,7 +194,7 @@
             <p14:sldId id="283"/>
           </p14:sldIdLst>
         </p14:section>
-        <p14:section name="05 당사 특약" id="{8095485c-be0e-6698-45f1-c85c4428358d}">
+        <p14:section name="05 당사 특약" id="{4dae0cdf-bb88-7828-789f-19786fc32404}">
           <p14:sldIdLst>
             <p14:sldId id="284"/>
             <p14:sldId id="285"/>
@@ -205,7 +205,7 @@
             <p14:sldId id="290"/>
           </p14:sldIdLst>
         </p14:section>
-        <p14:section name="06 현장 실천" id="{faa0b81c-8778-7089-1e54-6c9113232d0c}">
+        <p14:section name="06 현장 실천" id="{053ea3aa-9892-d0c7-4fc8-e4b975d519fe}">
           <p14:sldIdLst>
             <p14:sldId id="291"/>
             <p14:sldId id="292"/>
@@ -22834,7 +22834,7 @@
           </p:nvPr>
         </p:nvGraphicFramePr>
         <p:xfrm>
-          <a:off x="640080" y="2286000"/>
+          <a:off x="640080" y="2103120"/>
           <a:ext cx="10911535" cy="914400"/>
         </p:xfrm>
         <a:graphic>
@@ -22849,7 +22849,7 @@
                 <a:gridCol w="1691640"/>
                 <a:gridCol w="2039112"/>
               </a:tblGrid>
-              <a:tr h="384048">
+              <a:tr h="347472">
                 <a:tc>
                   <a:txBody>
                     <a:bodyPr/>
@@ -22859,7 +22859,7 @@
                         <a:buNone/>
                       </a:pPr>
                       <a:r>
-                        <a:rPr lang="en-US" sz="900" b="1" dirty="0">
+                        <a:rPr lang="en-US" sz="850" b="1" dirty="0">
                           <a:solidFill>
                             <a:srgbClr val="8B95A1"/>
                           </a:solidFill>
@@ -22869,7 +22869,7 @@
                         </a:rPr>
                         <a:t>구분</a:t>
                       </a:r>
-                      <a:endParaRPr lang="en-US" sz="900" dirty="0">
+                      <a:endParaRPr lang="en-US" sz="850" dirty="0">
                         <a:latin typeface="Pretendard" charset="0"/>
                         <a:ea typeface="Pretendard" charset="0"/>
                         <a:cs typeface="Pretendard" charset="0"/>
@@ -22927,7 +22927,7 @@
                         <a:buNone/>
                       </a:pPr>
                       <a:r>
-                        <a:rPr lang="en-US" sz="900" b="1" dirty="0">
+                        <a:rPr lang="en-US" sz="850" b="1" dirty="0">
                           <a:solidFill>
                             <a:srgbClr val="8B95A1"/>
                           </a:solidFill>
@@ -22937,7 +22937,7 @@
                         </a:rPr>
                         <a:t>1세대</a:t>
                       </a:r>
-                      <a:endParaRPr lang="en-US" sz="900" dirty="0">
+                      <a:endParaRPr lang="en-US" sz="850" dirty="0">
                         <a:latin typeface="Pretendard" charset="0"/>
                         <a:ea typeface="Pretendard" charset="0"/>
                         <a:cs typeface="Pretendard" charset="0"/>
@@ -22995,7 +22995,7 @@
                         <a:buNone/>
                       </a:pPr>
                       <a:r>
-                        <a:rPr lang="en-US" sz="900" b="1" dirty="0">
+                        <a:rPr lang="en-US" sz="850" b="1" dirty="0">
                           <a:solidFill>
                             <a:srgbClr val="8B95A1"/>
                           </a:solidFill>
@@ -23005,7 +23005,7 @@
                         </a:rPr>
                         <a:t>2세대</a:t>
                       </a:r>
-                      <a:endParaRPr lang="en-US" sz="900" dirty="0">
+                      <a:endParaRPr lang="en-US" sz="850" dirty="0">
                         <a:latin typeface="Pretendard" charset="0"/>
                         <a:ea typeface="Pretendard" charset="0"/>
                         <a:cs typeface="Pretendard" charset="0"/>
@@ -23063,7 +23063,7 @@
                         <a:buNone/>
                       </a:pPr>
                       <a:r>
-                        <a:rPr lang="en-US" sz="900" b="1" dirty="0">
+                        <a:rPr lang="en-US" sz="850" b="1" dirty="0">
                           <a:solidFill>
                             <a:srgbClr val="8B95A1"/>
                           </a:solidFill>
@@ -23073,7 +23073,7 @@
                         </a:rPr>
                         <a:t>3세대</a:t>
                       </a:r>
-                      <a:endParaRPr lang="en-US" sz="900" dirty="0">
+                      <a:endParaRPr lang="en-US" sz="850" dirty="0">
                         <a:latin typeface="Pretendard" charset="0"/>
                         <a:ea typeface="Pretendard" charset="0"/>
                         <a:cs typeface="Pretendard" charset="0"/>
@@ -23131,7 +23131,7 @@
                         <a:buNone/>
                       </a:pPr>
                       <a:r>
-                        <a:rPr lang="en-US" sz="900" b="1" dirty="0">
+                        <a:rPr lang="en-US" sz="850" b="1" dirty="0">
                           <a:solidFill>
                             <a:srgbClr val="8B95A1"/>
                           </a:solidFill>
@@ -23141,7 +23141,7 @@
                         </a:rPr>
                         <a:t>4세대</a:t>
                       </a:r>
-                      <a:endParaRPr lang="en-US" sz="900" dirty="0">
+                      <a:endParaRPr lang="en-US" sz="850" dirty="0">
                         <a:latin typeface="Pretendard" charset="0"/>
                         <a:ea typeface="Pretendard" charset="0"/>
                         <a:cs typeface="Pretendard" charset="0"/>
@@ -23199,7 +23199,7 @@
                         <a:buNone/>
                       </a:pPr>
                       <a:r>
-                        <a:rPr lang="en-US" sz="900" b="1" dirty="0">
+                        <a:rPr lang="en-US" sz="850" b="1" dirty="0">
                           <a:solidFill>
                             <a:srgbClr val="8B95A1"/>
                           </a:solidFill>
@@ -23209,7 +23209,7 @@
                         </a:rPr>
                         <a:t>5세대</a:t>
                       </a:r>
-                      <a:endParaRPr lang="en-US" sz="900" dirty="0">
+                      <a:endParaRPr lang="en-US" sz="850" dirty="0">
                         <a:latin typeface="Pretendard" charset="0"/>
                         <a:ea typeface="Pretendard" charset="0"/>
                         <a:cs typeface="Pretendard" charset="0"/>
@@ -23259,7 +23259,7 @@
                   </a:tcPr>
                 </a:tc>
               </a:tr>
-              <a:tr h="384048">
+              <a:tr h="347472">
                 <a:tc>
                   <a:txBody>
                     <a:bodyPr/>
@@ -23269,7 +23269,7 @@
                         <a:buNone/>
                       </a:pPr>
                       <a:r>
-                        <a:rPr lang="en-US" sz="1000" b="1" dirty="0">
+                        <a:rPr lang="en-US" sz="950" b="1" dirty="0">
                           <a:solidFill>
                             <a:srgbClr val="191F28"/>
                           </a:solidFill>
@@ -23279,7 +23279,7 @@
                         </a:rPr>
                         <a:t>가입 시기</a:t>
                       </a:r>
-                      <a:endParaRPr lang="en-US" sz="1000" dirty="0">
+                      <a:endParaRPr lang="en-US" sz="950" dirty="0">
                         <a:latin typeface="Pretendard" charset="0"/>
                         <a:ea typeface="Pretendard" charset="0"/>
                         <a:cs typeface="Pretendard" charset="0"/>
@@ -23337,7 +23337,7 @@
                         <a:buNone/>
                       </a:pPr>
                       <a:r>
-                        <a:rPr lang="en-US" sz="1000" dirty="0">
+                        <a:rPr lang="en-US" sz="950" dirty="0">
                           <a:solidFill>
                             <a:srgbClr val="191F28"/>
                           </a:solidFill>
@@ -23347,7 +23347,7 @@
                         </a:rPr>
                         <a:t>2009.9 이전</a:t>
                       </a:r>
-                      <a:endParaRPr lang="en-US" sz="1000" dirty="0">
+                      <a:endParaRPr lang="en-US" sz="950" dirty="0">
                         <a:latin typeface="Pretendard" charset="0"/>
                         <a:ea typeface="Pretendard" charset="0"/>
                         <a:cs typeface="Pretendard" charset="0"/>
@@ -23405,7 +23405,7 @@
                         <a:buNone/>
                       </a:pPr>
                       <a:r>
-                        <a:rPr lang="en-US" sz="1000" dirty="0">
+                        <a:rPr lang="en-US" sz="950" dirty="0">
                           <a:solidFill>
                             <a:srgbClr val="191F28"/>
                           </a:solidFill>
@@ -23415,7 +23415,7 @@
                         </a:rPr>
                         <a:t>2009.10 ~ 2017.3</a:t>
                       </a:r>
-                      <a:endParaRPr lang="en-US" sz="1000" dirty="0">
+                      <a:endParaRPr lang="en-US" sz="950" dirty="0">
                         <a:latin typeface="Pretendard" charset="0"/>
                         <a:ea typeface="Pretendard" charset="0"/>
                         <a:cs typeface="Pretendard" charset="0"/>
@@ -23473,7 +23473,7 @@
                         <a:buNone/>
                       </a:pPr>
                       <a:r>
-                        <a:rPr lang="en-US" sz="1000" dirty="0">
+                        <a:rPr lang="en-US" sz="950" dirty="0">
                           <a:solidFill>
                             <a:srgbClr val="191F28"/>
                           </a:solidFill>
@@ -23483,7 +23483,7 @@
                         </a:rPr>
                         <a:t>2017.4 ~ 2021.6</a:t>
                       </a:r>
-                      <a:endParaRPr lang="en-US" sz="1000" dirty="0">
+                      <a:endParaRPr lang="en-US" sz="950" dirty="0">
                         <a:latin typeface="Pretendard" charset="0"/>
                         <a:ea typeface="Pretendard" charset="0"/>
                         <a:cs typeface="Pretendard" charset="0"/>
@@ -23541,7 +23541,7 @@
                         <a:buNone/>
                       </a:pPr>
                       <a:r>
-                        <a:rPr lang="en-US" sz="1000" dirty="0">
+                        <a:rPr lang="en-US" sz="950" dirty="0">
                           <a:solidFill>
                             <a:srgbClr val="191F28"/>
                           </a:solidFill>
@@ -23551,7 +23551,7 @@
                         </a:rPr>
                         <a:t>2021.7 ~ 2026.5</a:t>
                       </a:r>
-                      <a:endParaRPr lang="en-US" sz="1000" dirty="0">
+                      <a:endParaRPr lang="en-US" sz="950" dirty="0">
                         <a:latin typeface="Pretendard" charset="0"/>
                         <a:ea typeface="Pretendard" charset="0"/>
                         <a:cs typeface="Pretendard" charset="0"/>
@@ -23609,7 +23609,7 @@
                         <a:buNone/>
                       </a:pPr>
                       <a:r>
-                        <a:rPr lang="en-US" sz="1000" dirty="0">
+                        <a:rPr lang="en-US" sz="950" dirty="0">
                           <a:solidFill>
                             <a:srgbClr val="191F28"/>
                           </a:solidFill>
@@ -23619,7 +23619,7 @@
                         </a:rPr>
                         <a:t>2026.5.6 ~</a:t>
                       </a:r>
-                      <a:endParaRPr lang="en-US" sz="1000" dirty="0">
+                      <a:endParaRPr lang="en-US" sz="950" dirty="0">
                         <a:latin typeface="Pretendard" charset="0"/>
                         <a:ea typeface="Pretendard" charset="0"/>
                         <a:cs typeface="Pretendard" charset="0"/>
@@ -23669,7 +23669,7 @@
                   </a:tcPr>
                 </a:tc>
               </a:tr>
-              <a:tr h="384048">
+              <a:tr h="347472">
                 <a:tc>
                   <a:txBody>
                     <a:bodyPr/>
@@ -23679,7 +23679,7 @@
                         <a:buNone/>
                       </a:pPr>
                       <a:r>
-                        <a:rPr lang="en-US" sz="1000" b="1" dirty="0">
+                        <a:rPr lang="en-US" sz="950" b="1" dirty="0">
                           <a:solidFill>
                             <a:srgbClr val="191F28"/>
                           </a:solidFill>
@@ -23689,7 +23689,7 @@
                         </a:rPr>
                         <a:t>보유 계약(2025년 말)</a:t>
                       </a:r>
-                      <a:endParaRPr lang="en-US" sz="1000" dirty="0">
+                      <a:endParaRPr lang="en-US" sz="950" dirty="0">
                         <a:latin typeface="Pretendard" charset="0"/>
                         <a:ea typeface="Pretendard" charset="0"/>
                         <a:cs typeface="Pretendard" charset="0"/>
@@ -23747,7 +23747,7 @@
                         <a:buNone/>
                       </a:pPr>
                       <a:r>
-                        <a:rPr lang="en-US" sz="1000" dirty="0">
+                        <a:rPr lang="en-US" sz="950" dirty="0">
                           <a:solidFill>
                             <a:srgbClr val="191F28"/>
                           </a:solidFill>
@@ -23757,7 +23757,7 @@
                         </a:rPr>
                         <a:t>618만 건 (17.1%)</a:t>
                       </a:r>
-                      <a:endParaRPr lang="en-US" sz="1000" dirty="0">
+                      <a:endParaRPr lang="en-US" sz="950" dirty="0">
                         <a:latin typeface="Pretendard" charset="0"/>
                         <a:ea typeface="Pretendard" charset="0"/>
                         <a:cs typeface="Pretendard" charset="0"/>
@@ -23815,7 +23815,7 @@
                         <a:buNone/>
                       </a:pPr>
                       <a:r>
-                        <a:rPr lang="en-US" sz="1000" dirty="0">
+                        <a:rPr lang="en-US" sz="950" dirty="0">
                           <a:solidFill>
                             <a:srgbClr val="191F28"/>
                           </a:solidFill>
@@ -23825,7 +23825,7 @@
                         </a:rPr>
                         <a:t>1,494만 건 (41.2%)</a:t>
                       </a:r>
-                      <a:endParaRPr lang="en-US" sz="1000" dirty="0">
+                      <a:endParaRPr lang="en-US" sz="950" dirty="0">
                         <a:latin typeface="Pretendard" charset="0"/>
                         <a:ea typeface="Pretendard" charset="0"/>
                         <a:cs typeface="Pretendard" charset="0"/>
@@ -23883,7 +23883,7 @@
                         <a:buNone/>
                       </a:pPr>
                       <a:r>
-                        <a:rPr lang="en-US" sz="1000" dirty="0">
+                        <a:rPr lang="en-US" sz="950" dirty="0">
                           <a:solidFill>
                             <a:srgbClr val="191F28"/>
                           </a:solidFill>
@@ -23893,7 +23893,7 @@
                         </a:rPr>
                         <a:t>783만 건 (21.6%)</a:t>
                       </a:r>
-                      <a:endParaRPr lang="en-US" sz="1000" dirty="0">
+                      <a:endParaRPr lang="en-US" sz="950" dirty="0">
                         <a:latin typeface="Pretendard" charset="0"/>
                         <a:ea typeface="Pretendard" charset="0"/>
                         <a:cs typeface="Pretendard" charset="0"/>
@@ -23951,7 +23951,7 @@
                         <a:buNone/>
                       </a:pPr>
                       <a:r>
-                        <a:rPr lang="en-US" sz="1000" dirty="0">
+                        <a:rPr lang="en-US" sz="950" dirty="0">
                           <a:solidFill>
                             <a:srgbClr val="191F28"/>
                           </a:solidFill>
@@ -23961,7 +23961,7 @@
                         </a:rPr>
                         <a:t>641만 건 (17.7%)</a:t>
                       </a:r>
-                      <a:endParaRPr lang="en-US" sz="1000" dirty="0">
+                      <a:endParaRPr lang="en-US" sz="950" dirty="0">
                         <a:latin typeface="Pretendard" charset="0"/>
                         <a:ea typeface="Pretendard" charset="0"/>
                         <a:cs typeface="Pretendard" charset="0"/>
@@ -24019,7 +24019,7 @@
                         <a:buNone/>
                       </a:pPr>
                       <a:r>
-                        <a:rPr lang="en-US" sz="1000" dirty="0">
+                        <a:rPr lang="en-US" sz="950" dirty="0">
                           <a:solidFill>
                             <a:srgbClr val="191F28"/>
                           </a:solidFill>
@@ -24029,7 +24029,7 @@
                         </a:rPr>
                         <a:t>출시 첫 달 신규 4.3만 건</a:t>
                       </a:r>
-                      <a:endParaRPr lang="en-US" sz="1000" dirty="0">
+                      <a:endParaRPr lang="en-US" sz="950" dirty="0">
                         <a:latin typeface="Pretendard" charset="0"/>
                         <a:ea typeface="Pretendard" charset="0"/>
                         <a:cs typeface="Pretendard" charset="0"/>
@@ -24079,7 +24079,7 @@
                   </a:tcPr>
                 </a:tc>
               </a:tr>
-              <a:tr h="384048">
+              <a:tr h="347472">
                 <a:tc>
                   <a:txBody>
                     <a:bodyPr/>
@@ -24089,7 +24089,7 @@
                         <a:buNone/>
                       </a:pPr>
                       <a:r>
-                        <a:rPr lang="en-US" sz="1000" b="1" dirty="0">
+                        <a:rPr lang="en-US" sz="950" b="1" dirty="0">
                           <a:solidFill>
                             <a:srgbClr val="191F28"/>
                           </a:solidFill>
@@ -24099,7 +24099,7 @@
                         </a:rPr>
                         <a:t>경과손해율(2025년)</a:t>
                       </a:r>
-                      <a:endParaRPr lang="en-US" sz="1000" dirty="0">
+                      <a:endParaRPr lang="en-US" sz="950" dirty="0">
                         <a:latin typeface="Pretendard" charset="0"/>
                         <a:ea typeface="Pretendard" charset="0"/>
                         <a:cs typeface="Pretendard" charset="0"/>
@@ -24157,7 +24157,7 @@
                         <a:buNone/>
                       </a:pPr>
                       <a:r>
-                        <a:rPr lang="en-US" sz="1000" dirty="0">
+                        <a:rPr lang="en-US" sz="950" dirty="0">
                           <a:solidFill>
                             <a:srgbClr val="F04452"/>
                           </a:solidFill>
@@ -24167,7 +24167,7 @@
                         </a:rPr>
                         <a:t>102.3%</a:t>
                       </a:r>
-                      <a:endParaRPr lang="en-US" sz="1000" dirty="0">
+                      <a:endParaRPr lang="en-US" sz="950" dirty="0">
                         <a:latin typeface="Pretendard" charset="0"/>
                         <a:ea typeface="Pretendard" charset="0"/>
                         <a:cs typeface="Pretendard" charset="0"/>
@@ -24225,7 +24225,7 @@
                         <a:buNone/>
                       </a:pPr>
                       <a:r>
-                        <a:rPr lang="en-US" sz="1000" dirty="0">
+                        <a:rPr lang="en-US" sz="950" dirty="0">
                           <a:solidFill>
                             <a:srgbClr val="191F28"/>
                           </a:solidFill>
@@ -24235,7 +24235,7 @@
                         </a:rPr>
                         <a:t>93.1%</a:t>
                       </a:r>
-                      <a:endParaRPr lang="en-US" sz="1000" dirty="0">
+                      <a:endParaRPr lang="en-US" sz="950" dirty="0">
                         <a:latin typeface="Pretendard" charset="0"/>
                         <a:ea typeface="Pretendard" charset="0"/>
                         <a:cs typeface="Pretendard" charset="0"/>
@@ -24293,7 +24293,7 @@
                         <a:buNone/>
                       </a:pPr>
                       <a:r>
-                        <a:rPr lang="en-US" sz="1000" dirty="0">
+                        <a:rPr lang="en-US" sz="950" dirty="0">
                           <a:solidFill>
                             <a:srgbClr val="F04452"/>
                           </a:solidFill>
@@ -24303,7 +24303,7 @@
                         </a:rPr>
                         <a:t>120.3%</a:t>
                       </a:r>
-                      <a:endParaRPr lang="en-US" sz="1000" dirty="0">
+                      <a:endParaRPr lang="en-US" sz="950" dirty="0">
                         <a:latin typeface="Pretendard" charset="0"/>
                         <a:ea typeface="Pretendard" charset="0"/>
                         <a:cs typeface="Pretendard" charset="0"/>
@@ -24361,7 +24361,7 @@
                         <a:buNone/>
                       </a:pPr>
                       <a:r>
-                        <a:rPr lang="en-US" sz="1000" dirty="0">
+                        <a:rPr lang="en-US" sz="950" dirty="0">
                           <a:solidFill>
                             <a:srgbClr val="F04452"/>
                           </a:solidFill>
@@ -24371,7 +24371,7 @@
                         </a:rPr>
                         <a:t>115.1%</a:t>
                       </a:r>
-                      <a:endParaRPr lang="en-US" sz="1000" dirty="0">
+                      <a:endParaRPr lang="en-US" sz="950" dirty="0">
                         <a:latin typeface="Pretendard" charset="0"/>
                         <a:ea typeface="Pretendard" charset="0"/>
                         <a:cs typeface="Pretendard" charset="0"/>
@@ -24429,7 +24429,7 @@
                         <a:buNone/>
                       </a:pPr>
                       <a:r>
-                        <a:rPr lang="en-US" sz="1000" dirty="0">
+                        <a:rPr lang="en-US" sz="950" dirty="0">
                           <a:solidFill>
                             <a:srgbClr val="191F28"/>
                           </a:solidFill>
@@ -24439,7 +24439,7 @@
                         </a:rPr>
                         <a:t>-</a:t>
                       </a:r>
-                      <a:endParaRPr lang="en-US" sz="1000" dirty="0">
+                      <a:endParaRPr lang="en-US" sz="950" dirty="0">
                         <a:latin typeface="Pretendard" charset="0"/>
                         <a:ea typeface="Pretendard" charset="0"/>
                         <a:cs typeface="Pretendard" charset="0"/>
@@ -24489,7 +24489,7 @@
                   </a:tcPr>
                 </a:tc>
               </a:tr>
-              <a:tr h="384048">
+              <a:tr h="347472">
                 <a:tc>
                   <a:txBody>
                     <a:bodyPr/>
@@ -24499,7 +24499,7 @@
                         <a:buNone/>
                       </a:pPr>
                       <a:r>
-                        <a:rPr lang="en-US" sz="1000" b="1" dirty="0">
+                        <a:rPr lang="en-US" sz="950" b="1" dirty="0">
                           <a:solidFill>
                             <a:srgbClr val="191F28"/>
                           </a:solidFill>
@@ -24509,7 +24509,7 @@
                         </a:rPr>
                         <a:t>2026년 보험료 인상</a:t>
                       </a:r>
-                      <a:endParaRPr lang="en-US" sz="1000" dirty="0">
+                      <a:endParaRPr lang="en-US" sz="950" dirty="0">
                         <a:latin typeface="Pretendard" charset="0"/>
                         <a:ea typeface="Pretendard" charset="0"/>
                         <a:cs typeface="Pretendard" charset="0"/>
@@ -24567,7 +24567,7 @@
                         <a:buNone/>
                       </a:pPr>
                       <a:r>
-                        <a:rPr lang="en-US" sz="1000" dirty="0">
+                        <a:rPr lang="en-US" sz="950" dirty="0">
                           <a:solidFill>
                             <a:srgbClr val="191F28"/>
                           </a:solidFill>
@@ -24577,7 +24577,7 @@
                         </a:rPr>
                         <a:t>3%대</a:t>
                       </a:r>
-                      <a:endParaRPr lang="en-US" sz="1000" dirty="0">
+                      <a:endParaRPr lang="en-US" sz="950" dirty="0">
                         <a:latin typeface="Pretendard" charset="0"/>
                         <a:ea typeface="Pretendard" charset="0"/>
                         <a:cs typeface="Pretendard" charset="0"/>
@@ -24635,7 +24635,7 @@
                         <a:buNone/>
                       </a:pPr>
                       <a:r>
-                        <a:rPr lang="en-US" sz="1000" dirty="0">
+                        <a:rPr lang="en-US" sz="950" dirty="0">
                           <a:solidFill>
                             <a:srgbClr val="191F28"/>
                           </a:solidFill>
@@ -24645,7 +24645,7 @@
                         </a:rPr>
                         <a:t>5%대</a:t>
                       </a:r>
-                      <a:endParaRPr lang="en-US" sz="1000" dirty="0">
+                      <a:endParaRPr lang="en-US" sz="950" dirty="0">
                         <a:latin typeface="Pretendard" charset="0"/>
                         <a:ea typeface="Pretendard" charset="0"/>
                         <a:cs typeface="Pretendard" charset="0"/>
@@ -24703,7 +24703,7 @@
                         <a:buNone/>
                       </a:pPr>
                       <a:r>
-                        <a:rPr lang="en-US" sz="1000" dirty="0">
+                        <a:rPr lang="en-US" sz="950" dirty="0">
                           <a:solidFill>
                             <a:srgbClr val="191F28"/>
                           </a:solidFill>
@@ -24713,7 +24713,7 @@
                         </a:rPr>
                         <a:t>16%대</a:t>
                       </a:r>
-                      <a:endParaRPr lang="en-US" sz="1000" dirty="0">
+                      <a:endParaRPr lang="en-US" sz="950" dirty="0">
                         <a:latin typeface="Pretendard" charset="0"/>
                         <a:ea typeface="Pretendard" charset="0"/>
                         <a:cs typeface="Pretendard" charset="0"/>
@@ -24771,7 +24771,7 @@
                         <a:buNone/>
                       </a:pPr>
                       <a:r>
-                        <a:rPr lang="en-US" sz="1000" dirty="0">
+                        <a:rPr lang="en-US" sz="950" dirty="0">
                           <a:solidFill>
                             <a:srgbClr val="191F28"/>
                           </a:solidFill>
@@ -24781,7 +24781,7 @@
                         </a:rPr>
                         <a:t>20%대</a:t>
                       </a:r>
-                      <a:endParaRPr lang="en-US" sz="1000" dirty="0">
+                      <a:endParaRPr lang="en-US" sz="950" dirty="0">
                         <a:latin typeface="Pretendard" charset="0"/>
                         <a:ea typeface="Pretendard" charset="0"/>
                         <a:cs typeface="Pretendard" charset="0"/>
@@ -24839,7 +24839,7 @@
                         <a:buNone/>
                       </a:pPr>
                       <a:r>
-                        <a:rPr lang="en-US" sz="1000" dirty="0">
+                        <a:rPr lang="en-US" sz="950" dirty="0">
                           <a:solidFill>
                             <a:srgbClr val="191F28"/>
                           </a:solidFill>
@@ -24847,9 +24847,9 @@
                           <a:ea typeface="Pretendard" pitchFamily="34" charset="-122"/>
                           <a:cs typeface="Pretendard" pitchFamily="34" charset="-120"/>
                         </a:rPr>
-                        <a:t>4세대 대비 약 30% 저렴(당국 추산)</a:t>
+                        <a:t>4세대 대비 약 30% 저렴</a:t>
                       </a:r>
-                      <a:endParaRPr lang="en-US" sz="1000" dirty="0">
+                      <a:endParaRPr lang="en-US" sz="950" dirty="0">
                         <a:latin typeface="Pretendard" charset="0"/>
                         <a:ea typeface="Pretendard" charset="0"/>
                         <a:cs typeface="Pretendard" charset="0"/>
@@ -24899,7 +24899,7 @@
                   </a:tcPr>
                 </a:tc>
               </a:tr>
-              <a:tr h="384048">
+              <a:tr h="347472">
                 <a:tc>
                   <a:txBody>
                     <a:bodyPr/>
@@ -24909,7 +24909,7 @@
                         <a:buNone/>
                       </a:pPr>
                       <a:r>
-                        <a:rPr lang="en-US" sz="1000" b="1" dirty="0">
+                        <a:rPr lang="en-US" sz="950" b="1" dirty="0">
                           <a:solidFill>
                             <a:srgbClr val="191F28"/>
                           </a:solidFill>
@@ -24919,7 +24919,7 @@
                         </a:rPr>
                         <a:t>비중증 비급여 자기부담</a:t>
                       </a:r>
-                      <a:endParaRPr lang="en-US" sz="1000" dirty="0">
+                      <a:endParaRPr lang="en-US" sz="950" dirty="0">
                         <a:latin typeface="Pretendard" charset="0"/>
                         <a:ea typeface="Pretendard" charset="0"/>
                         <a:cs typeface="Pretendard" charset="0"/>
@@ -24977,7 +24977,7 @@
                         <a:buNone/>
                       </a:pPr>
                       <a:r>
-                        <a:rPr lang="en-US" sz="1000" dirty="0">
+                        <a:rPr lang="en-US" sz="950" dirty="0">
                           <a:solidFill>
                             <a:srgbClr val="191F28"/>
                           </a:solidFill>
@@ -24987,7 +24987,7 @@
                         </a:rPr>
                         <a:t>없음 또는 낮음</a:t>
                       </a:r>
-                      <a:endParaRPr lang="en-US" sz="1000" dirty="0">
+                      <a:endParaRPr lang="en-US" sz="950" dirty="0">
                         <a:latin typeface="Pretendard" charset="0"/>
                         <a:ea typeface="Pretendard" charset="0"/>
                         <a:cs typeface="Pretendard" charset="0"/>
@@ -25045,7 +25045,7 @@
                         <a:buNone/>
                       </a:pPr>
                       <a:r>
-                        <a:rPr lang="en-US" sz="1000" dirty="0">
+                        <a:rPr lang="en-US" sz="950" dirty="0">
                           <a:solidFill>
                             <a:srgbClr val="191F28"/>
                           </a:solidFill>
@@ -25055,7 +25055,7 @@
                         </a:rPr>
                         <a:t>10~20%</a:t>
                       </a:r>
-                      <a:endParaRPr lang="en-US" sz="1000" dirty="0">
+                      <a:endParaRPr lang="en-US" sz="950" dirty="0">
                         <a:latin typeface="Pretendard" charset="0"/>
                         <a:ea typeface="Pretendard" charset="0"/>
                         <a:cs typeface="Pretendard" charset="0"/>
@@ -25113,7 +25113,7 @@
                         <a:buNone/>
                       </a:pPr>
                       <a:r>
-                        <a:rPr lang="en-US" sz="1000" dirty="0">
+                        <a:rPr lang="en-US" sz="950" dirty="0">
                           <a:solidFill>
                             <a:srgbClr val="191F28"/>
                           </a:solidFill>
@@ -25123,7 +25123,7 @@
                         </a:rPr>
                         <a:t>특약 30%</a:t>
                       </a:r>
-                      <a:endParaRPr lang="en-US" sz="1000" dirty="0">
+                      <a:endParaRPr lang="en-US" sz="950" dirty="0">
                         <a:latin typeface="Pretendard" charset="0"/>
                         <a:ea typeface="Pretendard" charset="0"/>
                         <a:cs typeface="Pretendard" charset="0"/>
@@ -25181,7 +25181,7 @@
                         <a:buNone/>
                       </a:pPr>
                       <a:r>
-                        <a:rPr lang="en-US" sz="1000" dirty="0">
+                        <a:rPr lang="en-US" sz="950" dirty="0">
                           <a:solidFill>
                             <a:srgbClr val="191F28"/>
                           </a:solidFill>
@@ -25191,7 +25191,7 @@
                         </a:rPr>
                         <a:t>특약 30%</a:t>
                       </a:r>
-                      <a:endParaRPr lang="en-US" sz="1000" dirty="0">
+                      <a:endParaRPr lang="en-US" sz="950" dirty="0">
                         <a:latin typeface="Pretendard" charset="0"/>
                         <a:ea typeface="Pretendard" charset="0"/>
                         <a:cs typeface="Pretendard" charset="0"/>
@@ -25249,7 +25249,7 @@
                         <a:buNone/>
                       </a:pPr>
                       <a:r>
-                        <a:rPr lang="en-US" sz="1000" dirty="0">
+                        <a:rPr lang="en-US" sz="950" dirty="0">
                           <a:solidFill>
                             <a:srgbClr val="1B64DA"/>
                           </a:solidFill>
@@ -25257,9 +25257,9 @@
                           <a:ea typeface="Pretendard" pitchFamily="34" charset="-122"/>
                           <a:cs typeface="Pretendard" pitchFamily="34" charset="-120"/>
                         </a:rPr>
-                        <a:t>50% · 연 1,000만원 · 도수·주사·체외충격파 제외</a:t>
+                        <a:t>50% · 연 1,000만원 · 도수·주사 제외</a:t>
                       </a:r>
-                      <a:endParaRPr lang="en-US" sz="1000" dirty="0">
+                      <a:endParaRPr lang="en-US" sz="950" dirty="0">
                         <a:latin typeface="Pretendard" charset="0"/>
                         <a:ea typeface="Pretendard" charset="0"/>
                         <a:cs typeface="Pretendard" charset="0"/>
@@ -25309,7 +25309,7 @@
                   </a:tcPr>
                 </a:tc>
               </a:tr>
-              <a:tr h="384048">
+              <a:tr h="347472">
                 <a:tc>
                   <a:txBody>
                     <a:bodyPr/>
@@ -25319,7 +25319,7 @@
                         <a:buNone/>
                       </a:pPr>
                       <a:r>
-                        <a:rPr lang="en-US" sz="1000" b="1" dirty="0">
+                        <a:rPr lang="en-US" sz="950" b="1" dirty="0">
                           <a:solidFill>
                             <a:srgbClr val="191F28"/>
                           </a:solidFill>
@@ -25329,7 +25329,7 @@
                         </a:rPr>
                         <a:t>재가입(약관 변경) 조항</a:t>
                       </a:r>
-                      <a:endParaRPr lang="en-US" sz="1000" dirty="0">
+                      <a:endParaRPr lang="en-US" sz="950" dirty="0">
                         <a:latin typeface="Pretendard" charset="0"/>
                         <a:ea typeface="Pretendard" charset="0"/>
                         <a:cs typeface="Pretendard" charset="0"/>
@@ -25387,7 +25387,7 @@
                         <a:buNone/>
                       </a:pPr>
                       <a:r>
-                        <a:rPr lang="en-US" sz="1000" dirty="0">
+                        <a:rPr lang="en-US" sz="950" dirty="0">
                           <a:solidFill>
                             <a:srgbClr val="191F28"/>
                           </a:solidFill>
@@ -25397,7 +25397,7 @@
                         </a:rPr>
                         <a:t>없음(2013.3 이전)</a:t>
                       </a:r>
-                      <a:endParaRPr lang="en-US" sz="1000" dirty="0">
+                      <a:endParaRPr lang="en-US" sz="950" dirty="0">
                         <a:latin typeface="Pretendard" charset="0"/>
                         <a:ea typeface="Pretendard" charset="0"/>
                         <a:cs typeface="Pretendard" charset="0"/>
@@ -25455,7 +25455,7 @@
                         <a:buNone/>
                       </a:pPr>
                       <a:r>
-                        <a:rPr lang="en-US" sz="1000" dirty="0">
+                        <a:rPr lang="en-US" sz="950" dirty="0">
                           <a:solidFill>
                             <a:srgbClr val="191F28"/>
                           </a:solidFill>
@@ -25465,7 +25465,7 @@
                         </a:rPr>
                         <a:t>없음(2013.3 이전)</a:t>
                       </a:r>
-                      <a:endParaRPr lang="en-US" sz="1000" dirty="0">
+                      <a:endParaRPr lang="en-US" sz="950" dirty="0">
                         <a:latin typeface="Pretendard" charset="0"/>
                         <a:ea typeface="Pretendard" charset="0"/>
                         <a:cs typeface="Pretendard" charset="0"/>
@@ -25523,7 +25523,7 @@
                         <a:buNone/>
                       </a:pPr>
                       <a:r>
-                        <a:rPr lang="en-US" sz="1000" dirty="0">
+                        <a:rPr lang="en-US" sz="950" dirty="0">
                           <a:solidFill>
                             <a:srgbClr val="191F28"/>
                           </a:solidFill>
@@ -25533,7 +25533,7 @@
                         </a:rPr>
                         <a:t>15년</a:t>
                       </a:r>
-                      <a:endParaRPr lang="en-US" sz="1000" dirty="0">
+                      <a:endParaRPr lang="en-US" sz="950" dirty="0">
                         <a:latin typeface="Pretendard" charset="0"/>
                         <a:ea typeface="Pretendard" charset="0"/>
                         <a:cs typeface="Pretendard" charset="0"/>
@@ -25591,7 +25591,7 @@
                         <a:buNone/>
                       </a:pPr>
                       <a:r>
-                        <a:rPr lang="en-US" sz="1000" dirty="0">
+                        <a:rPr lang="en-US" sz="950" dirty="0">
                           <a:solidFill>
                             <a:srgbClr val="191F28"/>
                           </a:solidFill>
@@ -25601,7 +25601,7 @@
                         </a:rPr>
                         <a:t>5년</a:t>
                       </a:r>
-                      <a:endParaRPr lang="en-US" sz="1000" dirty="0">
+                      <a:endParaRPr lang="en-US" sz="950" dirty="0">
                         <a:latin typeface="Pretendard" charset="0"/>
                         <a:ea typeface="Pretendard" charset="0"/>
                         <a:cs typeface="Pretendard" charset="0"/>
@@ -25659,7 +25659,7 @@
                         <a:buNone/>
                       </a:pPr>
                       <a:r>
-                        <a:rPr lang="en-US" sz="1000" dirty="0">
+                        <a:rPr lang="en-US" sz="950" dirty="0">
                           <a:solidFill>
                             <a:srgbClr val="191F28"/>
                           </a:solidFill>
@@ -25669,7 +25669,7 @@
                         </a:rPr>
                         <a:t>5년</a:t>
                       </a:r>
-                      <a:endParaRPr lang="en-US" sz="1000" dirty="0">
+                      <a:endParaRPr lang="en-US" sz="950" dirty="0">
                         <a:latin typeface="Pretendard" charset="0"/>
                         <a:ea typeface="Pretendard" charset="0"/>
                         <a:cs typeface="Pretendard" charset="0"/>
@@ -25719,7 +25719,7 @@
                   </a:tcPr>
                 </a:tc>
               </a:tr>
-              <a:tr h="384048">
+              <a:tr h="347472">
                 <a:tc>
                   <a:txBody>
                     <a:bodyPr/>
@@ -25729,7 +25729,7 @@
                         <a:buNone/>
                       </a:pPr>
                       <a:r>
-                        <a:rPr lang="en-US" sz="1000" b="1" dirty="0">
+                        <a:rPr lang="en-US" sz="950" b="1" dirty="0">
                           <a:solidFill>
                             <a:srgbClr val="191F28"/>
                           </a:solidFill>
@@ -25739,7 +25739,7 @@
                         </a:rPr>
                         <a:t>이번 전환 할인 대상</a:t>
                       </a:r>
-                      <a:endParaRPr lang="en-US" sz="1000" dirty="0">
+                      <a:endParaRPr lang="en-US" sz="950" dirty="0">
                         <a:latin typeface="Pretendard" charset="0"/>
                         <a:ea typeface="Pretendard" charset="0"/>
                         <a:cs typeface="Pretendard" charset="0"/>
@@ -25797,7 +25797,7 @@
                         <a:buNone/>
                       </a:pPr>
                       <a:r>
-                        <a:rPr lang="en-US" sz="1000" dirty="0">
+                        <a:rPr lang="en-US" sz="950" dirty="0">
                           <a:solidFill>
                             <a:srgbClr val="1B64DA"/>
                           </a:solidFill>
@@ -25807,7 +25807,7 @@
                         </a:rPr>
                         <a:t>대상</a:t>
                       </a:r>
-                      <a:endParaRPr lang="en-US" sz="1000" dirty="0">
+                      <a:endParaRPr lang="en-US" sz="950" dirty="0">
                         <a:latin typeface="Pretendard" charset="0"/>
                         <a:ea typeface="Pretendard" charset="0"/>
                         <a:cs typeface="Pretendard" charset="0"/>
@@ -25865,7 +25865,7 @@
                         <a:buNone/>
                       </a:pPr>
                       <a:r>
-                        <a:rPr lang="en-US" sz="1000" dirty="0">
+                        <a:rPr lang="en-US" sz="950" dirty="0">
                           <a:solidFill>
                             <a:srgbClr val="1B64DA"/>
                           </a:solidFill>
@@ -25875,7 +25875,7 @@
                         </a:rPr>
                         <a:t>대상(2013.3 이전 계약)</a:t>
                       </a:r>
-                      <a:endParaRPr lang="en-US" sz="1000" dirty="0">
+                      <a:endParaRPr lang="en-US" sz="950" dirty="0">
                         <a:latin typeface="Pretendard" charset="0"/>
                         <a:ea typeface="Pretendard" charset="0"/>
                         <a:cs typeface="Pretendard" charset="0"/>
@@ -25933,7 +25933,7 @@
                         <a:buNone/>
                       </a:pPr>
                       <a:r>
-                        <a:rPr lang="en-US" sz="1000" dirty="0">
+                        <a:rPr lang="en-US" sz="950" dirty="0">
                           <a:solidFill>
                             <a:srgbClr val="191F28"/>
                           </a:solidFill>
@@ -25943,7 +25943,7 @@
                         </a:rPr>
                         <a:t>-</a:t>
                       </a:r>
-                      <a:endParaRPr lang="en-US" sz="1000" dirty="0">
+                      <a:endParaRPr lang="en-US" sz="950" dirty="0">
                         <a:latin typeface="Pretendard" charset="0"/>
                         <a:ea typeface="Pretendard" charset="0"/>
                         <a:cs typeface="Pretendard" charset="0"/>
@@ -26001,7 +26001,7 @@
                         <a:buNone/>
                       </a:pPr>
                       <a:r>
-                        <a:rPr lang="en-US" sz="1000" dirty="0">
+                        <a:rPr lang="en-US" sz="950" dirty="0">
                           <a:solidFill>
                             <a:srgbClr val="191F28"/>
                           </a:solidFill>
@@ -26011,7 +26011,7 @@
                         </a:rPr>
                         <a:t>-</a:t>
                       </a:r>
-                      <a:endParaRPr lang="en-US" sz="1000" dirty="0">
+                      <a:endParaRPr lang="en-US" sz="950" dirty="0">
                         <a:latin typeface="Pretendard" charset="0"/>
                         <a:ea typeface="Pretendard" charset="0"/>
                         <a:cs typeface="Pretendard" charset="0"/>
@@ -26069,7 +26069,7 @@
                         <a:buNone/>
                       </a:pPr>
                       <a:r>
-                        <a:rPr lang="en-US" sz="1000" dirty="0">
+                        <a:rPr lang="en-US" sz="950" dirty="0">
                           <a:solidFill>
                             <a:srgbClr val="191F28"/>
                           </a:solidFill>
@@ -26079,7 +26079,7 @@
                         </a:rPr>
                         <a:t>전환 받는 쪽</a:t>
                       </a:r>
-                      <a:endParaRPr lang="en-US" sz="1000" dirty="0">
+                      <a:endParaRPr lang="en-US" sz="950" dirty="0">
                         <a:latin typeface="Pretendard" charset="0"/>
                         <a:ea typeface="Pretendard" charset="0"/>
                         <a:cs typeface="Pretendard" charset="0"/>
@@ -51913,7 +51913,7 @@
         <p:spPr>
           <a:xfrm>
             <a:off x="914400" y="3383280"/>
-            <a:ext cx="1186663" cy="347472"/>
+            <a:ext cx="1143457" cy="347472"/>
           </a:xfrm>
           <a:prstGeom prst="roundRect">
             <a:avLst>
@@ -51940,7 +51940,7 @@
         <p:spPr>
           <a:xfrm>
             <a:off x="914400" y="3383280"/>
-            <a:ext cx="1186663" cy="347472"/>
+            <a:ext cx="1143457" cy="347472"/>
           </a:xfrm>
           <a:prstGeom prst="rect">
             <a:avLst/>
@@ -51956,7 +51956,7 @@
               <a:buNone/>
             </a:pPr>
             <a:r>
-              <a:rPr lang="en-US" sz="950" b="1" dirty="0">
+              <a:rPr lang="en-US" sz="900" b="1" dirty="0">
                 <a:solidFill>
                   <a:srgbClr val="191F28"/>
                 </a:solidFill>
@@ -51966,7 +51966,7 @@
               </a:rPr>
               <a:t>수사기관 의뢰</a:t>
             </a:r>
-            <a:endParaRPr lang="en-US" sz="950" dirty="0"/>
+            <a:endParaRPr lang="en-US" sz="900" dirty="0"/>
           </a:p>
         </p:txBody>
       </p:sp>
@@ -51978,7 +51978,7 @@
         </p:nvSpPr>
         <p:spPr>
           <a:xfrm>
-            <a:off x="2101063" y="3383280"/>
+            <a:off x="2057857" y="3383280"/>
             <a:ext cx="310896" cy="347472"/>
           </a:xfrm>
           <a:prstGeom prst="rect">
@@ -51995,7 +51995,7 @@
               <a:buNone/>
             </a:pPr>
             <a:r>
-              <a:rPr lang="en-US" sz="1050" b="1" dirty="0">
+              <a:rPr lang="en-US" sz="1000" b="1" dirty="0">
                 <a:solidFill>
                   <a:srgbClr val="B0B8C1"/>
                 </a:solidFill>
@@ -52005,7 +52005,7 @@
               </a:rPr>
               <a:t>→</a:t>
             </a:r>
-            <a:endParaRPr lang="en-US" sz="1050" dirty="0"/>
+            <a:endParaRPr lang="en-US" sz="1000" dirty="0"/>
           </a:p>
         </p:txBody>
       </p:sp>
@@ -52017,8 +52017,8 @@
         </p:nvSpPr>
         <p:spPr>
           <a:xfrm>
-            <a:off x="2411959" y="3383280"/>
-            <a:ext cx="834847" cy="347472"/>
+            <a:off x="2368753" y="3383280"/>
+            <a:ext cx="810158" cy="347472"/>
           </a:xfrm>
           <a:prstGeom prst="roundRect">
             <a:avLst>
@@ -52044,8 +52044,8 @@
         </p:nvSpPr>
         <p:spPr>
           <a:xfrm>
-            <a:off x="2411959" y="3383280"/>
-            <a:ext cx="834847" cy="347472"/>
+            <a:off x="2368753" y="3383280"/>
+            <a:ext cx="810158" cy="347472"/>
           </a:xfrm>
           <a:prstGeom prst="rect">
             <a:avLst/>
@@ -52061,7 +52061,7 @@
               <a:buNone/>
             </a:pPr>
             <a:r>
-              <a:rPr lang="en-US" sz="950" b="1" dirty="0">
+              <a:rPr lang="en-US" sz="900" b="1" dirty="0">
                 <a:solidFill>
                   <a:srgbClr val="191F28"/>
                 </a:solidFill>
@@ -52071,7 +52071,7 @@
               </a:rPr>
               <a:t>자문회의</a:t>
             </a:r>
-            <a:endParaRPr lang="en-US" sz="950" dirty="0"/>
+            <a:endParaRPr lang="en-US" sz="900" dirty="0"/>
           </a:p>
         </p:txBody>
       </p:sp>
@@ -52083,7 +52083,7 @@
         </p:nvSpPr>
         <p:spPr>
           <a:xfrm>
-            <a:off x="3246806" y="3383280"/>
+            <a:off x="3178912" y="3383280"/>
             <a:ext cx="310896" cy="347472"/>
           </a:xfrm>
           <a:prstGeom prst="rect">
@@ -52100,7 +52100,7 @@
               <a:buNone/>
             </a:pPr>
             <a:r>
-              <a:rPr lang="en-US" sz="1050" b="1" dirty="0">
+              <a:rPr lang="en-US" sz="1000" b="1" dirty="0">
                 <a:solidFill>
                   <a:srgbClr val="B0B8C1"/>
                 </a:solidFill>
@@ -52110,7 +52110,7 @@
               </a:rPr>
               <a:t>→</a:t>
             </a:r>
-            <a:endParaRPr lang="en-US" sz="1050" dirty="0"/>
+            <a:endParaRPr lang="en-US" sz="1000" dirty="0"/>
           </a:p>
         </p:txBody>
       </p:sp>
@@ -52122,8 +52122,8 @@
         </p:nvSpPr>
         <p:spPr>
           <a:xfrm>
-            <a:off x="3557702" y="3383280"/>
-            <a:ext cx="1303934" cy="347472"/>
+            <a:off x="3489808" y="3383280"/>
+            <a:ext cx="921258" cy="347472"/>
           </a:xfrm>
           <a:prstGeom prst="roundRect">
             <a:avLst>
@@ -52149,8 +52149,8 @@
         </p:nvSpPr>
         <p:spPr>
           <a:xfrm>
-            <a:off x="3557702" y="3383280"/>
-            <a:ext cx="1303934" cy="347472"/>
+            <a:off x="3489808" y="3383280"/>
+            <a:ext cx="921258" cy="347472"/>
           </a:xfrm>
           <a:prstGeom prst="rect">
             <a:avLst/>
@@ -52166,7 +52166,7 @@
               <a:buNone/>
             </a:pPr>
             <a:r>
-              <a:rPr lang="en-US" sz="950" b="1" dirty="0">
+              <a:rPr lang="en-US" sz="900" b="1" dirty="0">
                 <a:solidFill>
                   <a:srgbClr val="191F28"/>
                 </a:solidFill>
@@ -52174,9 +52174,9 @@
                 <a:ea typeface="Pretendard" pitchFamily="34" charset="-122"/>
                 <a:cs typeface="Pretendard" pitchFamily="34" charset="-120"/>
               </a:rPr>
-              <a:t>공공심사위 의결</a:t>
-            </a:r>
-            <a:endParaRPr lang="en-US" sz="950" dirty="0"/>
+              <a:t>공공심사위</a:t>
+            </a:r>
+            <a:endParaRPr lang="en-US" sz="900" dirty="0"/>
           </a:p>
         </p:txBody>
       </p:sp>
@@ -52188,7 +52188,7 @@
         </p:nvSpPr>
         <p:spPr>
           <a:xfrm>
-            <a:off x="4861636" y="3383280"/>
+            <a:off x="4411066" y="3383280"/>
             <a:ext cx="310896" cy="347472"/>
           </a:xfrm>
           <a:prstGeom prst="rect">
@@ -52205,7 +52205,7 @@
               <a:buNone/>
             </a:pPr>
             <a:r>
-              <a:rPr lang="en-US" sz="1050" b="1" dirty="0">
+              <a:rPr lang="en-US" sz="1000" b="1" dirty="0">
                 <a:solidFill>
                   <a:srgbClr val="B0B8C1"/>
                 </a:solidFill>
@@ -52215,7 +52215,7 @@
               </a:rPr>
               <a:t>→</a:t>
             </a:r>
-            <a:endParaRPr lang="en-US" sz="1050" dirty="0"/>
+            <a:endParaRPr lang="en-US" sz="1000" dirty="0"/>
           </a:p>
         </p:txBody>
       </p:sp>
@@ -52227,8 +52227,8 @@
         </p:nvSpPr>
         <p:spPr>
           <a:xfrm>
-            <a:off x="5172532" y="3383280"/>
-            <a:ext cx="1186663" cy="347472"/>
+            <a:off x="4721962" y="3383280"/>
+            <a:ext cx="1143457" cy="347472"/>
           </a:xfrm>
           <a:prstGeom prst="roundRect">
             <a:avLst>
@@ -52254,8 +52254,8 @@
         </p:nvSpPr>
         <p:spPr>
           <a:xfrm>
-            <a:off x="5172532" y="3383280"/>
-            <a:ext cx="1186663" cy="347472"/>
+            <a:off x="4721962" y="3383280"/>
+            <a:ext cx="1143457" cy="347472"/>
           </a:xfrm>
           <a:prstGeom prst="rect">
             <a:avLst/>
@@ -52271,7 +52271,7 @@
               <a:buNone/>
             </a:pPr>
             <a:r>
-              <a:rPr lang="en-US" sz="950" b="1" dirty="0">
+              <a:rPr lang="en-US" sz="900" b="1" dirty="0">
                 <a:solidFill>
                   <a:srgbClr val="FFFFFF"/>
                 </a:solidFill>
@@ -52281,7 +52281,7 @@
               </a:rPr>
               <a:t>수사기관 통보</a:t>
             </a:r>
-            <a:endParaRPr lang="en-US" sz="950" dirty="0"/>
+            <a:endParaRPr lang="en-US" sz="900" dirty="0"/>
           </a:p>
         </p:txBody>
       </p:sp>
@@ -52468,7 +52468,7 @@
         <p:spPr>
           <a:xfrm>
             <a:off x="6507328" y="3383280"/>
-            <a:ext cx="600304" cy="347472"/>
+            <a:ext cx="587959" cy="347472"/>
           </a:xfrm>
           <a:prstGeom prst="roundRect">
             <a:avLst>
@@ -52495,7 +52495,7 @@
         <p:spPr>
           <a:xfrm>
             <a:off x="6507328" y="3383280"/>
-            <a:ext cx="600304" cy="347472"/>
+            <a:ext cx="587959" cy="347472"/>
           </a:xfrm>
           <a:prstGeom prst="rect">
             <a:avLst/>
@@ -52511,7 +52511,7 @@
               <a:buNone/>
             </a:pPr>
             <a:r>
-              <a:rPr lang="en-US" sz="950" b="1" dirty="0">
+              <a:rPr lang="en-US" sz="900" b="1" dirty="0">
                 <a:solidFill>
                   <a:srgbClr val="191F28"/>
                 </a:solidFill>
@@ -52521,7 +52521,7 @@
               </a:rPr>
               <a:t>청구</a:t>
             </a:r>
-            <a:endParaRPr lang="en-US" sz="950" dirty="0"/>
+            <a:endParaRPr lang="en-US" sz="900" dirty="0"/>
           </a:p>
         </p:txBody>
       </p:sp>
@@ -52533,7 +52533,7 @@
         </p:nvSpPr>
         <p:spPr>
           <a:xfrm>
-            <a:off x="7107631" y="3383280"/>
+            <a:off x="7095287" y="3383280"/>
             <a:ext cx="310896" cy="347472"/>
           </a:xfrm>
           <a:prstGeom prst="rect">
@@ -52550,7 +52550,7 @@
               <a:buNone/>
             </a:pPr>
             <a:r>
-              <a:rPr lang="en-US" sz="1050" b="1" dirty="0">
+              <a:rPr lang="en-US" sz="1000" b="1" dirty="0">
                 <a:solidFill>
                   <a:srgbClr val="B0B8C1"/>
                 </a:solidFill>
@@ -52560,7 +52560,7 @@
               </a:rPr>
               <a:t>→</a:t>
             </a:r>
-            <a:endParaRPr lang="en-US" sz="1050" dirty="0"/>
+            <a:endParaRPr lang="en-US" sz="1000" dirty="0"/>
           </a:p>
         </p:txBody>
       </p:sp>
@@ -52572,8 +52572,8 @@
         </p:nvSpPr>
         <p:spPr>
           <a:xfrm>
-            <a:off x="7418527" y="3383280"/>
-            <a:ext cx="952119" cy="347472"/>
+            <a:off x="7406183" y="3383280"/>
+            <a:ext cx="921258" cy="347472"/>
           </a:xfrm>
           <a:prstGeom prst="roundRect">
             <a:avLst>
@@ -52599,8 +52599,8 @@
         </p:nvSpPr>
         <p:spPr>
           <a:xfrm>
-            <a:off x="7418527" y="3383280"/>
-            <a:ext cx="952119" cy="347472"/>
+            <a:off x="7406183" y="3383280"/>
+            <a:ext cx="921258" cy="347472"/>
           </a:xfrm>
           <a:prstGeom prst="rect">
             <a:avLst/>
@@ -52616,7 +52616,7 @@
               <a:buNone/>
             </a:pPr>
             <a:r>
-              <a:rPr lang="en-US" sz="950" b="1" dirty="0">
+              <a:rPr lang="en-US" sz="900" b="1" dirty="0">
                 <a:solidFill>
                   <a:srgbClr val="191F28"/>
                 </a:solidFill>
@@ -52626,7 +52626,7 @@
               </a:rPr>
               <a:t>서류 심사</a:t>
             </a:r>
-            <a:endParaRPr lang="en-US" sz="950" dirty="0"/>
+            <a:endParaRPr lang="en-US" sz="900" dirty="0"/>
           </a:p>
         </p:txBody>
       </p:sp>
@@ -52638,7 +52638,7 @@
         </p:nvSpPr>
         <p:spPr>
           <a:xfrm>
-            <a:off x="8370646" y="3383280"/>
+            <a:off x="8327441" y="3383280"/>
             <a:ext cx="310896" cy="347472"/>
           </a:xfrm>
           <a:prstGeom prst="rect">
@@ -52655,7 +52655,7 @@
               <a:buNone/>
             </a:pPr>
             <a:r>
-              <a:rPr lang="en-US" sz="1050" b="1" dirty="0">
+              <a:rPr lang="en-US" sz="1000" b="1" dirty="0">
                 <a:solidFill>
                   <a:srgbClr val="B0B8C1"/>
                 </a:solidFill>
@@ -52665,7 +52665,7 @@
               </a:rPr>
               <a:t>→</a:t>
             </a:r>
-            <a:endParaRPr lang="en-US" sz="1050" dirty="0"/>
+            <a:endParaRPr lang="en-US" sz="1000" dirty="0"/>
           </a:p>
         </p:txBody>
       </p:sp>
@@ -52677,8 +52677,8 @@
         </p:nvSpPr>
         <p:spPr>
           <a:xfrm>
-            <a:off x="8681542" y="3383280"/>
-            <a:ext cx="834847" cy="347472"/>
+            <a:off x="8638337" y="3383280"/>
+            <a:ext cx="810158" cy="347472"/>
           </a:xfrm>
           <a:prstGeom prst="roundRect">
             <a:avLst>
@@ -52704,8 +52704,8 @@
         </p:nvSpPr>
         <p:spPr>
           <a:xfrm>
-            <a:off x="8681542" y="3383280"/>
-            <a:ext cx="834847" cy="347472"/>
+            <a:off x="8638337" y="3383280"/>
+            <a:ext cx="810158" cy="347472"/>
           </a:xfrm>
           <a:prstGeom prst="rect">
             <a:avLst/>
@@ -52721,7 +52721,7 @@
               <a:buNone/>
             </a:pPr>
             <a:r>
-              <a:rPr lang="en-US" sz="950" b="1" dirty="0">
+              <a:rPr lang="en-US" sz="900" b="1" dirty="0">
                 <a:solidFill>
                   <a:srgbClr val="191F28"/>
                 </a:solidFill>
@@ -52731,7 +52731,7 @@
               </a:rPr>
               <a:t>의료자문</a:t>
             </a:r>
-            <a:endParaRPr lang="en-US" sz="950" dirty="0"/>
+            <a:endParaRPr lang="en-US" sz="900" dirty="0"/>
           </a:p>
         </p:txBody>
       </p:sp>
@@ -52743,7 +52743,7 @@
         </p:nvSpPr>
         <p:spPr>
           <a:xfrm>
-            <a:off x="9516389" y="3383280"/>
+            <a:off x="9448495" y="3383280"/>
             <a:ext cx="310896" cy="347472"/>
           </a:xfrm>
           <a:prstGeom prst="rect">
@@ -52760,7 +52760,7 @@
               <a:buNone/>
             </a:pPr>
             <a:r>
-              <a:rPr lang="en-US" sz="1050" b="1" dirty="0">
+              <a:rPr lang="en-US" sz="1000" b="1" dirty="0">
                 <a:solidFill>
                   <a:srgbClr val="B0B8C1"/>
                 </a:solidFill>
@@ -52770,7 +52770,7 @@
               </a:rPr>
               <a:t>→</a:t>
             </a:r>
-            <a:endParaRPr lang="en-US" sz="1050" dirty="0"/>
+            <a:endParaRPr lang="en-US" sz="1000" dirty="0"/>
           </a:p>
         </p:txBody>
       </p:sp>
@@ -52782,8 +52782,8 @@
         </p:nvSpPr>
         <p:spPr>
           <a:xfrm>
-            <a:off x="9827285" y="3383280"/>
-            <a:ext cx="1538478" cy="347472"/>
+            <a:off x="9759391" y="3383280"/>
+            <a:ext cx="1476756" cy="347472"/>
           </a:xfrm>
           <a:prstGeom prst="roundRect">
             <a:avLst>
@@ -52809,8 +52809,8 @@
         </p:nvSpPr>
         <p:spPr>
           <a:xfrm>
-            <a:off x="9827285" y="3383280"/>
-            <a:ext cx="1538478" cy="347472"/>
+            <a:off x="9759391" y="3383280"/>
+            <a:ext cx="1476756" cy="347472"/>
           </a:xfrm>
           <a:prstGeom prst="rect">
             <a:avLst/>
@@ -52826,7 +52826,7 @@
               <a:buNone/>
             </a:pPr>
             <a:r>
-              <a:rPr lang="en-US" sz="950" b="1" dirty="0">
+              <a:rPr lang="en-US" sz="900" b="1" dirty="0">
                 <a:solidFill>
                   <a:srgbClr val="F04452"/>
                 </a:solidFill>
@@ -52836,7 +52836,7 @@
               </a:rPr>
               <a:t>입원 → 통원 판정</a:t>
             </a:r>
-            <a:endParaRPr lang="en-US" sz="950" dirty="0"/>
+            <a:endParaRPr lang="en-US" sz="900" dirty="0"/>
           </a:p>
         </p:txBody>
       </p:sp>
